--- a/public/fun/pack/pptx/birthday/돌잔치_20_첫번째이야기중심_소나기지난뒤.pptx
+++ b/public/fun/pack/pptx/birthday/돌잔치_20_첫번째이야기중심_소나기지난뒤.pptx
@@ -3347,7 +3347,7 @@
             <a:r>
               <a:rPr sz="4000" b="1" i="0">
                 <a:solidFill>
-                  <a:srgbClr val="23535C"/>
+                  <a:srgbClr val="11525F"/>
                 </a:solidFill>
               </a:rPr>
               <a:t>첫 번째 생일</a:t>
@@ -3385,7 +3385,7 @@
             <a:r>
               <a:rPr sz="1700" b="0" i="1">
                 <a:solidFill>
-                  <a:srgbClr val="23535C"/>
+                  <a:srgbClr val="11525F"/>
                 </a:solidFill>
               </a:rPr>
               <a:t>이름을 지어 놓고 며칠을 불러 봤습니다</a:t>
@@ -3460,7 +3460,7 @@
     <p:bg>
       <p:bgPr>
         <a:solidFill>
-          <a:srgbClr val="F0F8F9"/>
+          <a:srgbClr val="EEFAFC"/>
         </a:solidFill>
         <a:effectLst/>
       </p:bgPr>
@@ -3487,7 +3487,7 @@
             <a:avLst/>
           </a:prstGeom>
           <a:solidFill>
-            <a:srgbClr val="D1EBF0"/>
+            <a:srgbClr val="D1F3FA"/>
           </a:solidFill>
           <a:ln>
             <a:noFill/>
@@ -3516,7 +3516,7 @@
             <a:avLst/>
           </a:prstGeom>
           <a:solidFill>
-            <a:srgbClr val="3F95A6"/>
+            <a:srgbClr val="26AAC5"/>
           </a:solidFill>
           <a:ln>
             <a:noFill/>
@@ -3560,7 +3560,7 @@
             <a:r>
               <a:rPr sz="3000" b="1" i="0">
                 <a:solidFill>
-                  <a:srgbClr val="23535C"/>
+                  <a:srgbClr val="11525F"/>
                 </a:solidFill>
               </a:rPr>
               <a:t>우리 아기를 소개합니다</a:t>
@@ -3585,11 +3585,11 @@
             </a:avLst>
           </a:prstGeom>
           <a:solidFill>
-            <a:srgbClr val="D1EBF0"/>
+            <a:srgbClr val="D1F3FA"/>
           </a:solidFill>
           <a:ln w="19050">
             <a:solidFill>
-              <a:srgbClr val="3F95A6"/>
+              <a:srgbClr val="26AAC5"/>
             </a:solidFill>
             <a:prstDash val="dash"/>
           </a:ln>
@@ -3608,7 +3608,7 @@
             <a:r>
               <a:rPr sz="1400" b="0" i="0">
                 <a:solidFill>
-                  <a:srgbClr val="23535C"/>
+                  <a:srgbClr val="11525F"/>
                 </a:solidFill>
               </a:rPr>
               <a:t>아기 사진을 넣어 주세요</a:t>
@@ -3648,7 +3648,7 @@
                       <a:r>
                         <a:rPr sz="1500" b="1">
                           <a:solidFill>
-                            <a:srgbClr val="23535C"/>
+                            <a:srgbClr val="11525F"/>
                           </a:solidFill>
                         </a:rPr>
                         <a:t>이름</a:t>
@@ -3658,30 +3658,30 @@
                   <a:tcPr anchor="ctr" marL="73152" marR="73152">
                     <a:lnL w="9525" cap="flat" cmpd="sng" algn="ctr">
                       <a:solidFill>
-                        <a:srgbClr val="D1EBF0"/>
+                        <a:srgbClr val="D1F3FA"/>
                       </a:solidFill>
                       <a:prstDash val="solid"/>
                     </a:lnL>
                     <a:lnR w="9525" cap="flat" cmpd="sng" algn="ctr">
                       <a:solidFill>
-                        <a:srgbClr val="D1EBF0"/>
+                        <a:srgbClr val="D1F3FA"/>
                       </a:solidFill>
                       <a:prstDash val="solid"/>
                     </a:lnR>
                     <a:lnT w="9525" cap="flat" cmpd="sng" algn="ctr">
                       <a:solidFill>
-                        <a:srgbClr val="D1EBF0"/>
+                        <a:srgbClr val="D1F3FA"/>
                       </a:solidFill>
                       <a:prstDash val="solid"/>
                     </a:lnT>
                     <a:lnB w="9525" cap="flat" cmpd="sng" algn="ctr">
                       <a:solidFill>
-                        <a:srgbClr val="D1EBF0"/>
+                        <a:srgbClr val="D1F3FA"/>
                       </a:solidFill>
                       <a:prstDash val="solid"/>
                     </a:lnB>
                     <a:solidFill>
-                      <a:srgbClr val="D1EBF0"/>
+                      <a:srgbClr val="D1F3FA"/>
                     </a:solidFill>
                   </a:tcPr>
                 </a:tc>
@@ -3704,30 +3704,30 @@
                   <a:tcPr anchor="ctr" marL="73152" marR="73152">
                     <a:lnL w="9525" cap="flat" cmpd="sng" algn="ctr">
                       <a:solidFill>
-                        <a:srgbClr val="D1EBF0"/>
+                        <a:srgbClr val="D1F3FA"/>
                       </a:solidFill>
                       <a:prstDash val="solid"/>
                     </a:lnL>
                     <a:lnR w="9525" cap="flat" cmpd="sng" algn="ctr">
                       <a:solidFill>
-                        <a:srgbClr val="D1EBF0"/>
+                        <a:srgbClr val="D1F3FA"/>
                       </a:solidFill>
                       <a:prstDash val="solid"/>
                     </a:lnR>
                     <a:lnT w="9525" cap="flat" cmpd="sng" algn="ctr">
                       <a:solidFill>
-                        <a:srgbClr val="D1EBF0"/>
+                        <a:srgbClr val="D1F3FA"/>
                       </a:solidFill>
                       <a:prstDash val="solid"/>
                     </a:lnT>
                     <a:lnB w="9525" cap="flat" cmpd="sng" algn="ctr">
                       <a:solidFill>
-                        <a:srgbClr val="D1EBF0"/>
+                        <a:srgbClr val="D1F3FA"/>
                       </a:solidFill>
                       <a:prstDash val="solid"/>
                     </a:lnB>
                     <a:solidFill>
-                      <a:srgbClr val="F0F8F9"/>
+                      <a:srgbClr val="EEFAFC"/>
                     </a:solidFill>
                   </a:tcPr>
                 </a:tc>
@@ -3742,7 +3742,7 @@
                       <a:r>
                         <a:rPr sz="1500" b="1">
                           <a:solidFill>
-                            <a:srgbClr val="23535C"/>
+                            <a:srgbClr val="11525F"/>
                           </a:solidFill>
                         </a:rPr>
                         <a:t>생일</a:t>
@@ -3752,30 +3752,30 @@
                   <a:tcPr anchor="ctr" marL="73152" marR="73152">
                     <a:lnL w="9525" cap="flat" cmpd="sng" algn="ctr">
                       <a:solidFill>
-                        <a:srgbClr val="D1EBF0"/>
+                        <a:srgbClr val="D1F3FA"/>
                       </a:solidFill>
                       <a:prstDash val="solid"/>
                     </a:lnL>
                     <a:lnR w="9525" cap="flat" cmpd="sng" algn="ctr">
                       <a:solidFill>
-                        <a:srgbClr val="D1EBF0"/>
+                        <a:srgbClr val="D1F3FA"/>
                       </a:solidFill>
                       <a:prstDash val="solid"/>
                     </a:lnR>
                     <a:lnT w="9525" cap="flat" cmpd="sng" algn="ctr">
                       <a:solidFill>
-                        <a:srgbClr val="D1EBF0"/>
+                        <a:srgbClr val="D1F3FA"/>
                       </a:solidFill>
                       <a:prstDash val="solid"/>
                     </a:lnT>
                     <a:lnB w="9525" cap="flat" cmpd="sng" algn="ctr">
                       <a:solidFill>
-                        <a:srgbClr val="D1EBF0"/>
+                        <a:srgbClr val="D1F3FA"/>
                       </a:solidFill>
                       <a:prstDash val="solid"/>
                     </a:lnB>
                     <a:solidFill>
-                      <a:srgbClr val="D1EBF0"/>
+                      <a:srgbClr val="D1F3FA"/>
                     </a:solidFill>
                   </a:tcPr>
                 </a:tc>
@@ -3798,25 +3798,25 @@
                   <a:tcPr anchor="ctr" marL="73152" marR="73152">
                     <a:lnL w="9525" cap="flat" cmpd="sng" algn="ctr">
                       <a:solidFill>
-                        <a:srgbClr val="D1EBF0"/>
+                        <a:srgbClr val="D1F3FA"/>
                       </a:solidFill>
                       <a:prstDash val="solid"/>
                     </a:lnL>
                     <a:lnR w="9525" cap="flat" cmpd="sng" algn="ctr">
                       <a:solidFill>
-                        <a:srgbClr val="D1EBF0"/>
+                        <a:srgbClr val="D1F3FA"/>
                       </a:solidFill>
                       <a:prstDash val="solid"/>
                     </a:lnR>
                     <a:lnT w="9525" cap="flat" cmpd="sng" algn="ctr">
                       <a:solidFill>
-                        <a:srgbClr val="D1EBF0"/>
+                        <a:srgbClr val="D1F3FA"/>
                       </a:solidFill>
                       <a:prstDash val="solid"/>
                     </a:lnT>
                     <a:lnB w="9525" cap="flat" cmpd="sng" algn="ctr">
                       <a:solidFill>
-                        <a:srgbClr val="D1EBF0"/>
+                        <a:srgbClr val="D1F3FA"/>
                       </a:solidFill>
                       <a:prstDash val="solid"/>
                     </a:lnB>
@@ -3836,7 +3836,7 @@
                       <a:r>
                         <a:rPr sz="1500" b="1">
                           <a:solidFill>
-                            <a:srgbClr val="23535C"/>
+                            <a:srgbClr val="11525F"/>
                           </a:solidFill>
                         </a:rPr>
                         <a:t>키 · 몸무게</a:t>
@@ -3846,30 +3846,30 @@
                   <a:tcPr anchor="ctr" marL="73152" marR="73152">
                     <a:lnL w="9525" cap="flat" cmpd="sng" algn="ctr">
                       <a:solidFill>
-                        <a:srgbClr val="D1EBF0"/>
+                        <a:srgbClr val="D1F3FA"/>
                       </a:solidFill>
                       <a:prstDash val="solid"/>
                     </a:lnL>
                     <a:lnR w="9525" cap="flat" cmpd="sng" algn="ctr">
                       <a:solidFill>
-                        <a:srgbClr val="D1EBF0"/>
+                        <a:srgbClr val="D1F3FA"/>
                       </a:solidFill>
                       <a:prstDash val="solid"/>
                     </a:lnR>
                     <a:lnT w="9525" cap="flat" cmpd="sng" algn="ctr">
                       <a:solidFill>
-                        <a:srgbClr val="D1EBF0"/>
+                        <a:srgbClr val="D1F3FA"/>
                       </a:solidFill>
                       <a:prstDash val="solid"/>
                     </a:lnT>
                     <a:lnB w="9525" cap="flat" cmpd="sng" algn="ctr">
                       <a:solidFill>
-                        <a:srgbClr val="D1EBF0"/>
+                        <a:srgbClr val="D1F3FA"/>
                       </a:solidFill>
                       <a:prstDash val="solid"/>
                     </a:lnB>
                     <a:solidFill>
-                      <a:srgbClr val="D1EBF0"/>
+                      <a:srgbClr val="D1F3FA"/>
                     </a:solidFill>
                   </a:tcPr>
                 </a:tc>
@@ -3892,30 +3892,30 @@
                   <a:tcPr anchor="ctr" marL="73152" marR="73152">
                     <a:lnL w="9525" cap="flat" cmpd="sng" algn="ctr">
                       <a:solidFill>
-                        <a:srgbClr val="D1EBF0"/>
+                        <a:srgbClr val="D1F3FA"/>
                       </a:solidFill>
                       <a:prstDash val="solid"/>
                     </a:lnL>
                     <a:lnR w="9525" cap="flat" cmpd="sng" algn="ctr">
                       <a:solidFill>
-                        <a:srgbClr val="D1EBF0"/>
+                        <a:srgbClr val="D1F3FA"/>
                       </a:solidFill>
                       <a:prstDash val="solid"/>
                     </a:lnR>
                     <a:lnT w="9525" cap="flat" cmpd="sng" algn="ctr">
                       <a:solidFill>
-                        <a:srgbClr val="D1EBF0"/>
+                        <a:srgbClr val="D1F3FA"/>
                       </a:solidFill>
                       <a:prstDash val="solid"/>
                     </a:lnT>
                     <a:lnB w="9525" cap="flat" cmpd="sng" algn="ctr">
                       <a:solidFill>
-                        <a:srgbClr val="D1EBF0"/>
+                        <a:srgbClr val="D1F3FA"/>
                       </a:solidFill>
                       <a:prstDash val="solid"/>
                     </a:lnB>
                     <a:solidFill>
-                      <a:srgbClr val="F0F8F9"/>
+                      <a:srgbClr val="EEFAFC"/>
                     </a:solidFill>
                   </a:tcPr>
                 </a:tc>
@@ -3930,7 +3930,7 @@
                       <a:r>
                         <a:rPr sz="1500" b="1">
                           <a:solidFill>
-                            <a:srgbClr val="23535C"/>
+                            <a:srgbClr val="11525F"/>
                           </a:solidFill>
                         </a:rPr>
                         <a:t>좋아하는 것</a:t>
@@ -3940,30 +3940,30 @@
                   <a:tcPr anchor="ctr" marL="73152" marR="73152">
                     <a:lnL w="9525" cap="flat" cmpd="sng" algn="ctr">
                       <a:solidFill>
-                        <a:srgbClr val="D1EBF0"/>
+                        <a:srgbClr val="D1F3FA"/>
                       </a:solidFill>
                       <a:prstDash val="solid"/>
                     </a:lnL>
                     <a:lnR w="9525" cap="flat" cmpd="sng" algn="ctr">
                       <a:solidFill>
-                        <a:srgbClr val="D1EBF0"/>
+                        <a:srgbClr val="D1F3FA"/>
                       </a:solidFill>
                       <a:prstDash val="solid"/>
                     </a:lnR>
                     <a:lnT w="9525" cap="flat" cmpd="sng" algn="ctr">
                       <a:solidFill>
-                        <a:srgbClr val="D1EBF0"/>
+                        <a:srgbClr val="D1F3FA"/>
                       </a:solidFill>
                       <a:prstDash val="solid"/>
                     </a:lnT>
                     <a:lnB w="9525" cap="flat" cmpd="sng" algn="ctr">
                       <a:solidFill>
-                        <a:srgbClr val="D1EBF0"/>
+                        <a:srgbClr val="D1F3FA"/>
                       </a:solidFill>
                       <a:prstDash val="solid"/>
                     </a:lnB>
                     <a:solidFill>
-                      <a:srgbClr val="D1EBF0"/>
+                      <a:srgbClr val="D1F3FA"/>
                     </a:solidFill>
                   </a:tcPr>
                 </a:tc>
@@ -3986,25 +3986,25 @@
                   <a:tcPr anchor="ctr" marL="73152" marR="73152">
                     <a:lnL w="9525" cap="flat" cmpd="sng" algn="ctr">
                       <a:solidFill>
-                        <a:srgbClr val="D1EBF0"/>
+                        <a:srgbClr val="D1F3FA"/>
                       </a:solidFill>
                       <a:prstDash val="solid"/>
                     </a:lnL>
                     <a:lnR w="9525" cap="flat" cmpd="sng" algn="ctr">
                       <a:solidFill>
-                        <a:srgbClr val="D1EBF0"/>
+                        <a:srgbClr val="D1F3FA"/>
                       </a:solidFill>
                       <a:prstDash val="solid"/>
                     </a:lnR>
                     <a:lnT w="9525" cap="flat" cmpd="sng" algn="ctr">
                       <a:solidFill>
-                        <a:srgbClr val="D1EBF0"/>
+                        <a:srgbClr val="D1F3FA"/>
                       </a:solidFill>
                       <a:prstDash val="solid"/>
                     </a:lnT>
                     <a:lnB w="9525" cap="flat" cmpd="sng" algn="ctr">
                       <a:solidFill>
-                        <a:srgbClr val="D1EBF0"/>
+                        <a:srgbClr val="D1F3FA"/>
                       </a:solidFill>
                       <a:prstDash val="solid"/>
                     </a:lnB>
@@ -4024,7 +4024,7 @@
                       <a:r>
                         <a:rPr sz="1500" b="1">
                           <a:solidFill>
-                            <a:srgbClr val="23535C"/>
+                            <a:srgbClr val="11525F"/>
                           </a:solidFill>
                         </a:rPr>
                         <a:t>별명</a:t>
@@ -4034,30 +4034,30 @@
                   <a:tcPr anchor="ctr" marL="73152" marR="73152">
                     <a:lnL w="9525" cap="flat" cmpd="sng" algn="ctr">
                       <a:solidFill>
-                        <a:srgbClr val="D1EBF0"/>
+                        <a:srgbClr val="D1F3FA"/>
                       </a:solidFill>
                       <a:prstDash val="solid"/>
                     </a:lnL>
                     <a:lnR w="9525" cap="flat" cmpd="sng" algn="ctr">
                       <a:solidFill>
-                        <a:srgbClr val="D1EBF0"/>
+                        <a:srgbClr val="D1F3FA"/>
                       </a:solidFill>
                       <a:prstDash val="solid"/>
                     </a:lnR>
                     <a:lnT w="9525" cap="flat" cmpd="sng" algn="ctr">
                       <a:solidFill>
-                        <a:srgbClr val="D1EBF0"/>
+                        <a:srgbClr val="D1F3FA"/>
                       </a:solidFill>
                       <a:prstDash val="solid"/>
                     </a:lnT>
                     <a:lnB w="9525" cap="flat" cmpd="sng" algn="ctr">
                       <a:solidFill>
-                        <a:srgbClr val="D1EBF0"/>
+                        <a:srgbClr val="D1F3FA"/>
                       </a:solidFill>
                       <a:prstDash val="solid"/>
                     </a:lnB>
                     <a:solidFill>
-                      <a:srgbClr val="D1EBF0"/>
+                      <a:srgbClr val="D1F3FA"/>
                     </a:solidFill>
                   </a:tcPr>
                 </a:tc>
@@ -4080,30 +4080,30 @@
                   <a:tcPr anchor="ctr" marL="73152" marR="73152">
                     <a:lnL w="9525" cap="flat" cmpd="sng" algn="ctr">
                       <a:solidFill>
-                        <a:srgbClr val="D1EBF0"/>
+                        <a:srgbClr val="D1F3FA"/>
                       </a:solidFill>
                       <a:prstDash val="solid"/>
                     </a:lnL>
                     <a:lnR w="9525" cap="flat" cmpd="sng" algn="ctr">
                       <a:solidFill>
-                        <a:srgbClr val="D1EBF0"/>
+                        <a:srgbClr val="D1F3FA"/>
                       </a:solidFill>
                       <a:prstDash val="solid"/>
                     </a:lnR>
                     <a:lnT w="9525" cap="flat" cmpd="sng" algn="ctr">
                       <a:solidFill>
-                        <a:srgbClr val="D1EBF0"/>
+                        <a:srgbClr val="D1F3FA"/>
                       </a:solidFill>
                       <a:prstDash val="solid"/>
                     </a:lnT>
                     <a:lnB w="9525" cap="flat" cmpd="sng" algn="ctr">
                       <a:solidFill>
-                        <a:srgbClr val="D1EBF0"/>
+                        <a:srgbClr val="D1F3FA"/>
                       </a:solidFill>
                       <a:prstDash val="solid"/>
                     </a:lnB>
                     <a:solidFill>
-                      <a:srgbClr val="F0F8F9"/>
+                      <a:srgbClr val="EEFAFC"/>
                     </a:solidFill>
                   </a:tcPr>
                 </a:tc>
@@ -4118,7 +4118,7 @@
                       <a:r>
                         <a:rPr sz="1500" b="1">
                           <a:solidFill>
-                            <a:srgbClr val="23535C"/>
+                            <a:srgbClr val="11525F"/>
                           </a:solidFill>
                         </a:rPr>
                         <a:t>부모의 마음</a:t>
@@ -4128,30 +4128,30 @@
                   <a:tcPr anchor="ctr" marL="73152" marR="73152">
                     <a:lnL w="9525" cap="flat" cmpd="sng" algn="ctr">
                       <a:solidFill>
-                        <a:srgbClr val="D1EBF0"/>
+                        <a:srgbClr val="D1F3FA"/>
                       </a:solidFill>
                       <a:prstDash val="solid"/>
                     </a:lnL>
                     <a:lnR w="9525" cap="flat" cmpd="sng" algn="ctr">
                       <a:solidFill>
-                        <a:srgbClr val="D1EBF0"/>
+                        <a:srgbClr val="D1F3FA"/>
                       </a:solidFill>
                       <a:prstDash val="solid"/>
                     </a:lnR>
                     <a:lnT w="9525" cap="flat" cmpd="sng" algn="ctr">
                       <a:solidFill>
-                        <a:srgbClr val="D1EBF0"/>
+                        <a:srgbClr val="D1F3FA"/>
                       </a:solidFill>
                       <a:prstDash val="solid"/>
                     </a:lnT>
                     <a:lnB w="9525" cap="flat" cmpd="sng" algn="ctr">
                       <a:solidFill>
-                        <a:srgbClr val="D1EBF0"/>
+                        <a:srgbClr val="D1F3FA"/>
                       </a:solidFill>
                       <a:prstDash val="solid"/>
                     </a:lnB>
                     <a:solidFill>
-                      <a:srgbClr val="D1EBF0"/>
+                      <a:srgbClr val="D1F3FA"/>
                     </a:solidFill>
                   </a:tcPr>
                 </a:tc>
@@ -4174,25 +4174,25 @@
                   <a:tcPr anchor="ctr" marL="73152" marR="73152">
                     <a:lnL w="9525" cap="flat" cmpd="sng" algn="ctr">
                       <a:solidFill>
-                        <a:srgbClr val="D1EBF0"/>
+                        <a:srgbClr val="D1F3FA"/>
                       </a:solidFill>
                       <a:prstDash val="solid"/>
                     </a:lnL>
                     <a:lnR w="9525" cap="flat" cmpd="sng" algn="ctr">
                       <a:solidFill>
-                        <a:srgbClr val="D1EBF0"/>
+                        <a:srgbClr val="D1F3FA"/>
                       </a:solidFill>
                       <a:prstDash val="solid"/>
                     </a:lnR>
                     <a:lnT w="9525" cap="flat" cmpd="sng" algn="ctr">
                       <a:solidFill>
-                        <a:srgbClr val="D1EBF0"/>
+                        <a:srgbClr val="D1F3FA"/>
                       </a:solidFill>
                       <a:prstDash val="solid"/>
                     </a:lnT>
                     <a:lnB w="9525" cap="flat" cmpd="sng" algn="ctr">
                       <a:solidFill>
-                        <a:srgbClr val="D1EBF0"/>
+                        <a:srgbClr val="D1F3FA"/>
                       </a:solidFill>
                       <a:prstDash val="solid"/>
                     </a:lnB>
@@ -4220,7 +4220,7 @@
     <p:bg>
       <p:bgPr>
         <a:solidFill>
-          <a:srgbClr val="F0F8F9"/>
+          <a:srgbClr val="EEFAFC"/>
         </a:solidFill>
         <a:effectLst/>
       </p:bgPr>
@@ -4247,7 +4247,7 @@
             <a:avLst/>
           </a:prstGeom>
           <a:solidFill>
-            <a:srgbClr val="D1EBF0"/>
+            <a:srgbClr val="D1F3FA"/>
           </a:solidFill>
           <a:ln>
             <a:noFill/>
@@ -4276,7 +4276,7 @@
             <a:avLst/>
           </a:prstGeom>
           <a:solidFill>
-            <a:srgbClr val="3F95A6"/>
+            <a:srgbClr val="26AAC5"/>
           </a:solidFill>
           <a:ln>
             <a:noFill/>
@@ -4320,7 +4320,7 @@
             <a:r>
               <a:rPr sz="3000" b="1" i="0">
                 <a:solidFill>
-                  <a:srgbClr val="23535C"/>
+                  <a:srgbClr val="11525F"/>
                 </a:solidFill>
               </a:rPr>
               <a:t>태어난 날 이야기</a:t>
@@ -4343,7 +4343,7 @@
             <a:avLst/>
           </a:prstGeom>
           <a:solidFill>
-            <a:srgbClr val="D1EBF0"/>
+            <a:srgbClr val="D1F3FA"/>
           </a:solidFill>
           <a:ln>
             <a:noFill/>
@@ -4372,7 +4372,7 @@
             <a:avLst/>
           </a:prstGeom>
           <a:solidFill>
-            <a:srgbClr val="3F95A6"/>
+            <a:srgbClr val="26AAC5"/>
           </a:solidFill>
           <a:ln w="38100">
             <a:solidFill>
@@ -4418,7 +4418,7 @@
             <a:r>
               <a:rPr sz="1600" b="1" i="0">
                 <a:solidFill>
-                  <a:srgbClr val="3F95A6"/>
+                  <a:srgbClr val="26AAC5"/>
                 </a:solidFill>
               </a:rPr>
               <a:t>임신</a:t>
@@ -4456,7 +4456,7 @@
             <a:r>
               <a:rPr sz="1800" b="1" i="0">
                 <a:solidFill>
-                  <a:srgbClr val="23535C"/>
+                  <a:srgbClr val="11525F"/>
                 </a:solidFill>
               </a:rPr>
               <a:t>소식을 들은 날</a:t>
@@ -4517,7 +4517,7 @@
             <a:avLst/>
           </a:prstGeom>
           <a:solidFill>
-            <a:srgbClr val="3F95A6"/>
+            <a:srgbClr val="26AAC5"/>
           </a:solidFill>
           <a:ln w="38100">
             <a:solidFill>
@@ -4563,7 +4563,7 @@
             <a:r>
               <a:rPr sz="1600" b="1" i="0">
                 <a:solidFill>
-                  <a:srgbClr val="3F95A6"/>
+                  <a:srgbClr val="26AAC5"/>
                 </a:solidFill>
               </a:rPr>
               <a:t>출산</a:t>
@@ -4601,7 +4601,7 @@
             <a:r>
               <a:rPr sz="1800" b="1" i="0">
                 <a:solidFill>
-                  <a:srgbClr val="23535C"/>
+                  <a:srgbClr val="11525F"/>
                 </a:solidFill>
               </a:rPr>
               <a:t>태어난 날</a:t>
@@ -4662,7 +4662,7 @@
             <a:avLst/>
           </a:prstGeom>
           <a:solidFill>
-            <a:srgbClr val="3F95A6"/>
+            <a:srgbClr val="26AAC5"/>
           </a:solidFill>
           <a:ln w="38100">
             <a:solidFill>
@@ -4708,7 +4708,7 @@
             <a:r>
               <a:rPr sz="1600" b="1" i="0">
                 <a:solidFill>
-                  <a:srgbClr val="3F95A6"/>
+                  <a:srgbClr val="26AAC5"/>
                 </a:solidFill>
               </a:rPr>
               <a:t>첫 만남</a:t>
@@ -4746,7 +4746,7 @@
             <a:r>
               <a:rPr sz="1800" b="1" i="0">
                 <a:solidFill>
-                  <a:srgbClr val="23535C"/>
+                  <a:srgbClr val="11525F"/>
                 </a:solidFill>
               </a:rPr>
               <a:t>품에 안은 순간</a:t>
@@ -4807,7 +4807,7 @@
             <a:avLst/>
           </a:prstGeom>
           <a:solidFill>
-            <a:srgbClr val="3F95A6"/>
+            <a:srgbClr val="26AAC5"/>
           </a:solidFill>
           <a:ln w="38100">
             <a:solidFill>
@@ -4853,7 +4853,7 @@
             <a:r>
               <a:rPr sz="1600" b="1" i="0">
                 <a:solidFill>
-                  <a:srgbClr val="3F95A6"/>
+                  <a:srgbClr val="26AAC5"/>
                 </a:solidFill>
               </a:rPr>
               <a:t>집으로</a:t>
@@ -4891,7 +4891,7 @@
             <a:r>
               <a:rPr sz="1800" b="1" i="0">
                 <a:solidFill>
-                  <a:srgbClr val="23535C"/>
+                  <a:srgbClr val="11525F"/>
                 </a:solidFill>
               </a:rPr>
               <a:t>함께 돌아온 날</a:t>
@@ -4951,7 +4951,7 @@
     <p:bg>
       <p:bgPr>
         <a:solidFill>
-          <a:srgbClr val="F0F8F9"/>
+          <a:srgbClr val="EEFAFC"/>
         </a:solidFill>
         <a:effectLst/>
       </p:bgPr>
@@ -4978,7 +4978,7 @@
             <a:avLst/>
           </a:prstGeom>
           <a:solidFill>
-            <a:srgbClr val="D1EBF0"/>
+            <a:srgbClr val="D1F3FA"/>
           </a:solidFill>
           <a:ln>
             <a:noFill/>
@@ -5007,7 +5007,7 @@
             <a:avLst/>
           </a:prstGeom>
           <a:solidFill>
-            <a:srgbClr val="3F95A6"/>
+            <a:srgbClr val="26AAC5"/>
           </a:solidFill>
           <a:ln>
             <a:noFill/>
@@ -5051,7 +5051,7 @@
             <a:r>
               <a:rPr sz="3000" b="1" i="0">
                 <a:solidFill>
-                  <a:srgbClr val="23535C"/>
+                  <a:srgbClr val="11525F"/>
                 </a:solidFill>
               </a:rPr>
               <a:t>첫 번째 순간들</a:t>
@@ -5076,11 +5076,11 @@
             </a:avLst>
           </a:prstGeom>
           <a:solidFill>
-            <a:srgbClr val="F0F8F9"/>
+            <a:srgbClr val="EEFAFC"/>
           </a:solidFill>
           <a:ln w="15875">
             <a:solidFill>
-              <a:srgbClr val="D1EBF0"/>
+              <a:srgbClr val="D1F3FA"/>
             </a:solidFill>
           </a:ln>
         </p:spPr>
@@ -5107,7 +5107,7 @@
             <a:avLst/>
           </a:prstGeom>
           <a:solidFill>
-            <a:srgbClr val="3F95A6"/>
+            <a:srgbClr val="26AAC5"/>
           </a:solidFill>
           <a:ln>
             <a:noFill/>
@@ -5165,7 +5165,7 @@
             <a:r>
               <a:rPr sz="1800" b="1" i="0">
                 <a:solidFill>
-                  <a:srgbClr val="23535C"/>
+                  <a:srgbClr val="11525F"/>
                 </a:solidFill>
               </a:rPr>
               <a:t>첫 웃음</a:t>
@@ -5228,11 +5228,11 @@
             </a:avLst>
           </a:prstGeom>
           <a:solidFill>
-            <a:srgbClr val="F0F8F9"/>
+            <a:srgbClr val="EEFAFC"/>
           </a:solidFill>
           <a:ln w="15875">
             <a:solidFill>
-              <a:srgbClr val="D1EBF0"/>
+              <a:srgbClr val="D1F3FA"/>
             </a:solidFill>
           </a:ln>
         </p:spPr>
@@ -5259,7 +5259,7 @@
             <a:avLst/>
           </a:prstGeom>
           <a:solidFill>
-            <a:srgbClr val="3F95A6"/>
+            <a:srgbClr val="26AAC5"/>
           </a:solidFill>
           <a:ln>
             <a:noFill/>
@@ -5317,7 +5317,7 @@
             <a:r>
               <a:rPr sz="1800" b="1" i="0">
                 <a:solidFill>
-                  <a:srgbClr val="23535C"/>
+                  <a:srgbClr val="11525F"/>
                 </a:solidFill>
               </a:rPr>
               <a:t>첫 뒤집기</a:t>
@@ -5380,11 +5380,11 @@
             </a:avLst>
           </a:prstGeom>
           <a:solidFill>
-            <a:srgbClr val="F0F8F9"/>
+            <a:srgbClr val="EEFAFC"/>
           </a:solidFill>
           <a:ln w="15875">
             <a:solidFill>
-              <a:srgbClr val="D1EBF0"/>
+              <a:srgbClr val="D1F3FA"/>
             </a:solidFill>
           </a:ln>
         </p:spPr>
@@ -5411,7 +5411,7 @@
             <a:avLst/>
           </a:prstGeom>
           <a:solidFill>
-            <a:srgbClr val="3F95A6"/>
+            <a:srgbClr val="26AAC5"/>
           </a:solidFill>
           <a:ln>
             <a:noFill/>
@@ -5469,7 +5469,7 @@
             <a:r>
               <a:rPr sz="1800" b="1" i="0">
                 <a:solidFill>
-                  <a:srgbClr val="23535C"/>
+                  <a:srgbClr val="11525F"/>
                 </a:solidFill>
               </a:rPr>
               <a:t>첫 이</a:t>
@@ -5532,11 +5532,11 @@
             </a:avLst>
           </a:prstGeom>
           <a:solidFill>
-            <a:srgbClr val="F0F8F9"/>
+            <a:srgbClr val="EEFAFC"/>
           </a:solidFill>
           <a:ln w="15875">
             <a:solidFill>
-              <a:srgbClr val="D1EBF0"/>
+              <a:srgbClr val="D1F3FA"/>
             </a:solidFill>
           </a:ln>
         </p:spPr>
@@ -5563,7 +5563,7 @@
             <a:avLst/>
           </a:prstGeom>
           <a:solidFill>
-            <a:srgbClr val="3F95A6"/>
+            <a:srgbClr val="26AAC5"/>
           </a:solidFill>
           <a:ln>
             <a:noFill/>
@@ -5621,7 +5621,7 @@
             <a:r>
               <a:rPr sz="1800" b="1" i="0">
                 <a:solidFill>
-                  <a:srgbClr val="23535C"/>
+                  <a:srgbClr val="11525F"/>
                 </a:solidFill>
               </a:rPr>
               <a:t>첫 걸음</a:t>
@@ -5681,7 +5681,7 @@
     <p:bg>
       <p:bgPr>
         <a:solidFill>
-          <a:srgbClr val="F0F8F9"/>
+          <a:srgbClr val="EEFAFC"/>
         </a:solidFill>
         <a:effectLst/>
       </p:bgPr>
@@ -5708,7 +5708,7 @@
             <a:avLst/>
           </a:prstGeom>
           <a:solidFill>
-            <a:srgbClr val="D1EBF0"/>
+            <a:srgbClr val="D1F3FA"/>
           </a:solidFill>
           <a:ln>
             <a:noFill/>
@@ -5737,7 +5737,7 @@
             <a:avLst/>
           </a:prstGeom>
           <a:solidFill>
-            <a:srgbClr val="3F95A6"/>
+            <a:srgbClr val="26AAC5"/>
           </a:solidFill>
           <a:ln>
             <a:noFill/>
@@ -5781,7 +5781,7 @@
             <a:r>
               <a:rPr sz="3000" b="1" i="0">
                 <a:solidFill>
-                  <a:srgbClr val="23535C"/>
+                  <a:srgbClr val="11525F"/>
                 </a:solidFill>
               </a:rPr>
               <a:t>사진 모음</a:t>
@@ -5806,11 +5806,11 @@
             </a:avLst>
           </a:prstGeom>
           <a:solidFill>
-            <a:srgbClr val="D1EBF0"/>
+            <a:srgbClr val="D1F3FA"/>
           </a:solidFill>
           <a:ln w="19050">
             <a:solidFill>
-              <a:srgbClr val="3F95A6"/>
+              <a:srgbClr val="26AAC5"/>
             </a:solidFill>
             <a:prstDash val="dash"/>
           </a:ln>
@@ -5829,7 +5829,7 @@
             <a:r>
               <a:rPr sz="1200" b="0" i="0">
                 <a:solidFill>
-                  <a:srgbClr val="23535C"/>
+                  <a:srgbClr val="11525F"/>
                 </a:solidFill>
               </a:rPr>
               <a:t>사진 1</a:t>
@@ -5854,11 +5854,11 @@
             </a:avLst>
           </a:prstGeom>
           <a:solidFill>
-            <a:srgbClr val="D1EBF0"/>
+            <a:srgbClr val="D1F3FA"/>
           </a:solidFill>
           <a:ln w="19050">
             <a:solidFill>
-              <a:srgbClr val="3F95A6"/>
+              <a:srgbClr val="26AAC5"/>
             </a:solidFill>
             <a:prstDash val="dash"/>
           </a:ln>
@@ -5877,7 +5877,7 @@
             <a:r>
               <a:rPr sz="1200" b="0" i="0">
                 <a:solidFill>
-                  <a:srgbClr val="23535C"/>
+                  <a:srgbClr val="11525F"/>
                 </a:solidFill>
               </a:rPr>
               <a:t>사진 2</a:t>
@@ -5902,11 +5902,11 @@
             </a:avLst>
           </a:prstGeom>
           <a:solidFill>
-            <a:srgbClr val="D1EBF0"/>
+            <a:srgbClr val="D1F3FA"/>
           </a:solidFill>
           <a:ln w="19050">
             <a:solidFill>
-              <a:srgbClr val="3F95A6"/>
+              <a:srgbClr val="26AAC5"/>
             </a:solidFill>
             <a:prstDash val="dash"/>
           </a:ln>
@@ -5925,7 +5925,7 @@
             <a:r>
               <a:rPr sz="1200" b="0" i="0">
                 <a:solidFill>
-                  <a:srgbClr val="23535C"/>
+                  <a:srgbClr val="11525F"/>
                 </a:solidFill>
               </a:rPr>
               <a:t>사진 3</a:t>
@@ -5950,11 +5950,11 @@
             </a:avLst>
           </a:prstGeom>
           <a:solidFill>
-            <a:srgbClr val="D1EBF0"/>
+            <a:srgbClr val="D1F3FA"/>
           </a:solidFill>
           <a:ln w="19050">
             <a:solidFill>
-              <a:srgbClr val="3F95A6"/>
+              <a:srgbClr val="26AAC5"/>
             </a:solidFill>
             <a:prstDash val="dash"/>
           </a:ln>
@@ -5973,7 +5973,7 @@
             <a:r>
               <a:rPr sz="1200" b="0" i="0">
                 <a:solidFill>
-                  <a:srgbClr val="23535C"/>
+                  <a:srgbClr val="11525F"/>
                 </a:solidFill>
               </a:rPr>
               <a:t>사진 4</a:t>
@@ -5998,11 +5998,11 @@
             </a:avLst>
           </a:prstGeom>
           <a:solidFill>
-            <a:srgbClr val="D1EBF0"/>
+            <a:srgbClr val="D1F3FA"/>
           </a:solidFill>
           <a:ln w="19050">
             <a:solidFill>
-              <a:srgbClr val="3F95A6"/>
+              <a:srgbClr val="26AAC5"/>
             </a:solidFill>
             <a:prstDash val="dash"/>
           </a:ln>
@@ -6021,7 +6021,7 @@
             <a:r>
               <a:rPr sz="1200" b="0" i="0">
                 <a:solidFill>
-                  <a:srgbClr val="23535C"/>
+                  <a:srgbClr val="11525F"/>
                 </a:solidFill>
               </a:rPr>
               <a:t>사진 5</a:t>
@@ -6046,11 +6046,11 @@
             </a:avLst>
           </a:prstGeom>
           <a:solidFill>
-            <a:srgbClr val="D1EBF0"/>
+            <a:srgbClr val="D1F3FA"/>
           </a:solidFill>
           <a:ln w="19050">
             <a:solidFill>
-              <a:srgbClr val="3F95A6"/>
+              <a:srgbClr val="26AAC5"/>
             </a:solidFill>
             <a:prstDash val="dash"/>
           </a:ln>
@@ -6069,7 +6069,7 @@
             <a:r>
               <a:rPr sz="1200" b="0" i="0">
                 <a:solidFill>
-                  <a:srgbClr val="23535C"/>
+                  <a:srgbClr val="11525F"/>
                 </a:solidFill>
               </a:rPr>
               <a:t>사진 6</a:t>
@@ -6094,11 +6094,11 @@
             </a:avLst>
           </a:prstGeom>
           <a:solidFill>
-            <a:srgbClr val="D1EBF0"/>
+            <a:srgbClr val="D1F3FA"/>
           </a:solidFill>
           <a:ln w="19050">
             <a:solidFill>
-              <a:srgbClr val="3F95A6"/>
+              <a:srgbClr val="26AAC5"/>
             </a:solidFill>
             <a:prstDash val="dash"/>
           </a:ln>
@@ -6117,7 +6117,7 @@
             <a:r>
               <a:rPr sz="1200" b="0" i="0">
                 <a:solidFill>
-                  <a:srgbClr val="23535C"/>
+                  <a:srgbClr val="11525F"/>
                 </a:solidFill>
               </a:rPr>
               <a:t>사진 7</a:t>
@@ -6142,11 +6142,11 @@
             </a:avLst>
           </a:prstGeom>
           <a:solidFill>
-            <a:srgbClr val="D1EBF0"/>
+            <a:srgbClr val="D1F3FA"/>
           </a:solidFill>
           <a:ln w="19050">
             <a:solidFill>
-              <a:srgbClr val="3F95A6"/>
+              <a:srgbClr val="26AAC5"/>
             </a:solidFill>
             <a:prstDash val="dash"/>
           </a:ln>
@@ -6165,7 +6165,7 @@
             <a:r>
               <a:rPr sz="1200" b="0" i="0">
                 <a:solidFill>
-                  <a:srgbClr val="23535C"/>
+                  <a:srgbClr val="11525F"/>
                 </a:solidFill>
               </a:rPr>
               <a:t>사진 8</a:t>
@@ -6245,7 +6245,7 @@
             <a:r>
               <a:rPr sz="3400" b="1" i="0">
                 <a:solidFill>
-                  <a:srgbClr val="23535C"/>
+                  <a:srgbClr val="11525F"/>
                 </a:solidFill>
               </a:rPr>
               <a:t>와 주셔서 고맙습니다</a:t>
@@ -6283,7 +6283,7 @@
             <a:r>
               <a:rPr sz="1700" b="0" i="1">
                 <a:solidFill>
-                  <a:srgbClr val="23535C"/>
+                  <a:srgbClr val="11525F"/>
                 </a:solidFill>
               </a:rPr>
               <a:t>아이가 한 살이 되었습니다</a:t>
@@ -6348,34 +6348,34 @@
         <a:sysClr val="window" lastClr="FFFFFF"/>
       </a:lt1>
       <a:dk2>
-        <a:srgbClr val="23535C"/>
+        <a:srgbClr val="11525F"/>
       </a:dk2>
       <a:lt2>
-        <a:srgbClr val="F0F8F9"/>
+        <a:srgbClr val="EEFAFC"/>
       </a:lt2>
       <a:accent1>
-        <a:srgbClr val="3F95A6"/>
+        <a:srgbClr val="26AAC5"/>
       </a:accent1>
       <a:accent2>
-        <a:srgbClr val="913B58"/>
+        <a:srgbClr val="209DB6"/>
       </a:accent2>
       <a:accent3>
-        <a:srgbClr val="23535C"/>
+        <a:srgbClr val="11525F"/>
       </a:accent3>
       <a:accent4>
-        <a:srgbClr val="D1EBF0"/>
+        <a:srgbClr val="D1F3FA"/>
       </a:accent4>
       <a:accent5>
-        <a:srgbClr val="68687F"/>
+        <a:srgbClr val="23A4BE"/>
       </a:accent5>
       <a:accent6>
-        <a:srgbClr val="7B989D"/>
+        <a:srgbClr val="70979F"/>
       </a:accent6>
       <a:hlink>
-        <a:srgbClr val="3F95A6"/>
+        <a:srgbClr val="26AAC5"/>
       </a:hlink>
       <a:folHlink>
-        <a:srgbClr val="23535C"/>
+        <a:srgbClr val="11525F"/>
       </a:folHlink>
     </a:clrScheme>
     <a:fontScheme name="Office">
